--- a/extras/media/logo.pptx
+++ b/extras/media/logo.pptx
@@ -243,7 +243,7 @@
           <a:p>
             <a:fld id="{68079804-AA75-486A-AC1E-9996C04BB69C}" type="datetimeFigureOut">
               <a:rPr lang="en-US" smtClean="0"/>
-              <a:t>9/6/2021</a:t>
+              <a:t>9/12/2021</a:t>
             </a:fld>
             <a:endParaRPr lang="en-US"/>
           </a:p>
@@ -413,7 +413,7 @@
           <a:p>
             <a:fld id="{68079804-AA75-486A-AC1E-9996C04BB69C}" type="datetimeFigureOut">
               <a:rPr lang="en-US" smtClean="0"/>
-              <a:t>9/6/2021</a:t>
+              <a:t>9/12/2021</a:t>
             </a:fld>
             <a:endParaRPr lang="en-US"/>
           </a:p>
@@ -593,7 +593,7 @@
           <a:p>
             <a:fld id="{68079804-AA75-486A-AC1E-9996C04BB69C}" type="datetimeFigureOut">
               <a:rPr lang="en-US" smtClean="0"/>
-              <a:t>9/6/2021</a:t>
+              <a:t>9/12/2021</a:t>
             </a:fld>
             <a:endParaRPr lang="en-US"/>
           </a:p>
@@ -763,7 +763,7 @@
           <a:p>
             <a:fld id="{68079804-AA75-486A-AC1E-9996C04BB69C}" type="datetimeFigureOut">
               <a:rPr lang="en-US" smtClean="0"/>
-              <a:t>9/6/2021</a:t>
+              <a:t>9/12/2021</a:t>
             </a:fld>
             <a:endParaRPr lang="en-US"/>
           </a:p>
@@ -1009,7 +1009,7 @@
           <a:p>
             <a:fld id="{68079804-AA75-486A-AC1E-9996C04BB69C}" type="datetimeFigureOut">
               <a:rPr lang="en-US" smtClean="0"/>
-              <a:t>9/6/2021</a:t>
+              <a:t>9/12/2021</a:t>
             </a:fld>
             <a:endParaRPr lang="en-US"/>
           </a:p>
@@ -1241,7 +1241,7 @@
           <a:p>
             <a:fld id="{68079804-AA75-486A-AC1E-9996C04BB69C}" type="datetimeFigureOut">
               <a:rPr lang="en-US" smtClean="0"/>
-              <a:t>9/6/2021</a:t>
+              <a:t>9/12/2021</a:t>
             </a:fld>
             <a:endParaRPr lang="en-US"/>
           </a:p>
@@ -1608,7 +1608,7 @@
           <a:p>
             <a:fld id="{68079804-AA75-486A-AC1E-9996C04BB69C}" type="datetimeFigureOut">
               <a:rPr lang="en-US" smtClean="0"/>
-              <a:t>9/6/2021</a:t>
+              <a:t>9/12/2021</a:t>
             </a:fld>
             <a:endParaRPr lang="en-US"/>
           </a:p>
@@ -1726,7 +1726,7 @@
           <a:p>
             <a:fld id="{68079804-AA75-486A-AC1E-9996C04BB69C}" type="datetimeFigureOut">
               <a:rPr lang="en-US" smtClean="0"/>
-              <a:t>9/6/2021</a:t>
+              <a:t>9/12/2021</a:t>
             </a:fld>
             <a:endParaRPr lang="en-US"/>
           </a:p>
@@ -1821,7 +1821,7 @@
           <a:p>
             <a:fld id="{68079804-AA75-486A-AC1E-9996C04BB69C}" type="datetimeFigureOut">
               <a:rPr lang="en-US" smtClean="0"/>
-              <a:t>9/6/2021</a:t>
+              <a:t>9/12/2021</a:t>
             </a:fld>
             <a:endParaRPr lang="en-US"/>
           </a:p>
@@ -2098,7 +2098,7 @@
           <a:p>
             <a:fld id="{68079804-AA75-486A-AC1E-9996C04BB69C}" type="datetimeFigureOut">
               <a:rPr lang="en-US" smtClean="0"/>
-              <a:t>9/6/2021</a:t>
+              <a:t>9/12/2021</a:t>
             </a:fld>
             <a:endParaRPr lang="en-US"/>
           </a:p>
@@ -2351,7 +2351,7 @@
           <a:p>
             <a:fld id="{68079804-AA75-486A-AC1E-9996C04BB69C}" type="datetimeFigureOut">
               <a:rPr lang="en-US" smtClean="0"/>
-              <a:t>9/6/2021</a:t>
+              <a:t>9/12/2021</a:t>
             </a:fld>
             <a:endParaRPr lang="en-US"/>
           </a:p>
@@ -2564,7 +2564,7 @@
           <a:p>
             <a:fld id="{68079804-AA75-486A-AC1E-9996C04BB69C}" type="datetimeFigureOut">
               <a:rPr lang="en-US" smtClean="0"/>
-              <a:t>9/6/2021</a:t>
+              <a:t>9/12/2021</a:t>
             </a:fld>
             <a:endParaRPr lang="en-US"/>
           </a:p>
@@ -2991,7 +2991,7 @@
         </p:blipFill>
         <p:spPr>
           <a:xfrm>
-            <a:off x="1182250" y="1209190"/>
+            <a:off x="1209145" y="1209190"/>
             <a:ext cx="4114800" cy="3753840"/>
           </a:xfrm>
           <a:prstGeom prst="rect">
@@ -3021,7 +3021,7 @@
         </p:blipFill>
         <p:spPr>
           <a:xfrm flipH="1">
-            <a:off x="6771095" y="1183242"/>
+            <a:off x="6797990" y="1183242"/>
             <a:ext cx="4114800" cy="3753839"/>
           </a:xfrm>
           <a:prstGeom prst="rect">
@@ -3124,66 +3124,6 @@
           </p:txBody>
         </p:sp>
       </p:grpSp>
-      <p:pic>
-        <p:nvPicPr>
-          <p:cNvPr id="17" name="Picture 16"/>
-          <p:cNvPicPr>
-            <a:picLocks noChangeAspect="1"/>
-          </p:cNvPicPr>
-          <p:nvPr/>
-        </p:nvPicPr>
-        <p:blipFill>
-          <a:blip r:embed="rId4" cstate="print">
-            <a:extLst>
-              <a:ext uri="{28A0092B-C50C-407E-A947-70E740481C1C}">
-                <a14:useLocalDpi xmlns:a14="http://schemas.microsoft.com/office/drawing/2010/main" val="0"/>
-              </a:ext>
-            </a:extLst>
-          </a:blip>
-          <a:stretch>
-            <a:fillRect/>
-          </a:stretch>
-        </p:blipFill>
-        <p:spPr>
-          <a:xfrm>
-            <a:off x="4667122" y="4888962"/>
-            <a:ext cx="911300" cy="914400"/>
-          </a:xfrm>
-          <a:prstGeom prst="rect">
-            <a:avLst/>
-          </a:prstGeom>
-        </p:spPr>
-      </p:pic>
-      <p:pic>
-        <p:nvPicPr>
-          <p:cNvPr id="18" name="Picture 17"/>
-          <p:cNvPicPr>
-            <a:picLocks noChangeAspect="1"/>
-          </p:cNvPicPr>
-          <p:nvPr/>
-        </p:nvPicPr>
-        <p:blipFill>
-          <a:blip r:embed="rId5" cstate="print">
-            <a:extLst>
-              <a:ext uri="{28A0092B-C50C-407E-A947-70E740481C1C}">
-                <a14:useLocalDpi xmlns:a14="http://schemas.microsoft.com/office/drawing/2010/main" val="0"/>
-              </a:ext>
-            </a:extLst>
-          </a:blip>
-          <a:stretch>
-            <a:fillRect/>
-          </a:stretch>
-        </p:blipFill>
-        <p:spPr>
-          <a:xfrm>
-            <a:off x="6617291" y="4902177"/>
-            <a:ext cx="934149" cy="914400"/>
-          </a:xfrm>
-          <a:prstGeom prst="rect">
-            <a:avLst/>
-          </a:prstGeom>
-        </p:spPr>
-      </p:pic>
     </p:spTree>
     <p:extLst>
       <p:ext uri="{BB962C8B-B14F-4D97-AF65-F5344CB8AC3E}">
